--- a/docs/Stanford_vs_ECGFounder_2page.pptx
+++ b/docs/Stanford_vs_ECGFounder_2page.pptx
@@ -1050,8 +1050,8 @@
         </p:nvSpPr>
         <p:spPr>
           <a:xfrm>
-            <a:off x="548640" y="1554480"/>
-            <a:ext cx="5257800" cy="2194560"/>
+            <a:off x="548640" y="1417320"/>
+            <a:ext cx="5257800" cy="1783080"/>
           </a:xfrm>
           <a:prstGeom prst="rect">
             <a:avLst/>
@@ -1075,8 +1075,8 @@
         </p:nvSpPr>
         <p:spPr>
           <a:xfrm>
-            <a:off x="548640" y="1554480"/>
-            <a:ext cx="118872" cy="2194560"/>
+            <a:off x="548640" y="1417320"/>
+            <a:ext cx="118872" cy="1783080"/>
           </a:xfrm>
           <a:prstGeom prst="rect">
             <a:avLst/>
@@ -1095,7 +1095,7 @@
         </p:nvSpPr>
         <p:spPr>
           <a:xfrm>
-            <a:off x="868680" y="1737360"/>
+            <a:off x="868680" y="1600200"/>
             <a:ext cx="4754880" cy="457200"/>
           </a:xfrm>
           <a:prstGeom prst="rect">
@@ -1134,7 +1134,7 @@
         </p:nvSpPr>
         <p:spPr>
           <a:xfrm>
-            <a:off x="868680" y="2212848"/>
+            <a:off x="868680" y="2075688"/>
             <a:ext cx="4754880" cy="365760"/>
           </a:xfrm>
           <a:prstGeom prst="rect">
@@ -1173,8 +1173,8 @@
         </p:nvSpPr>
         <p:spPr>
           <a:xfrm>
-            <a:off x="868680" y="2743200"/>
-            <a:ext cx="4709160" cy="822960"/>
+            <a:off x="868680" y="2606040"/>
+            <a:ext cx="4709160" cy="411480"/>
           </a:xfrm>
           <a:prstGeom prst="rect">
             <a:avLst/>
@@ -1279,8 +1279,8 @@
         </p:nvSpPr>
         <p:spPr>
           <a:xfrm>
-            <a:off x="6355080" y="1554480"/>
-            <a:ext cx="5257800" cy="2194560"/>
+            <a:off x="6355080" y="1417320"/>
+            <a:ext cx="5257800" cy="1783080"/>
           </a:xfrm>
           <a:prstGeom prst="rect">
             <a:avLst/>
@@ -1304,8 +1304,8 @@
         </p:nvSpPr>
         <p:spPr>
           <a:xfrm>
-            <a:off x="6355080" y="1554480"/>
-            <a:ext cx="118872" cy="2194560"/>
+            <a:off x="6355080" y="1417320"/>
+            <a:ext cx="118872" cy="1783080"/>
           </a:xfrm>
           <a:prstGeom prst="rect">
             <a:avLst/>
@@ -1324,7 +1324,7 @@
         </p:nvSpPr>
         <p:spPr>
           <a:xfrm>
-            <a:off x="6675120" y="1737360"/>
+            <a:off x="6675120" y="1600200"/>
             <a:ext cx="4754880" cy="457200"/>
           </a:xfrm>
           <a:prstGeom prst="rect">
@@ -1363,7 +1363,7 @@
         </p:nvSpPr>
         <p:spPr>
           <a:xfrm>
-            <a:off x="6675120" y="2212848"/>
+            <a:off x="6675120" y="2075688"/>
             <a:ext cx="4754880" cy="365760"/>
           </a:xfrm>
           <a:prstGeom prst="rect">
@@ -1402,8 +1402,8 @@
         </p:nvSpPr>
         <p:spPr>
           <a:xfrm>
-            <a:off x="6675120" y="2743200"/>
-            <a:ext cx="4709160" cy="822960"/>
+            <a:off x="6675120" y="2606040"/>
+            <a:ext cx="4709160" cy="411480"/>
           </a:xfrm>
           <a:prstGeom prst="rect">
             <a:avLst/>
@@ -1515,7 +1515,7 @@
           </p:nvPr>
         </p:nvGraphicFramePr>
         <p:xfrm>
-          <a:off x="548640" y="3977640"/>
+          <a:off x="548640" y="3383280"/>
           <a:ext cx="11064240" cy="914400"/>
         </p:xfrm>
         <a:graphic>
@@ -1527,7 +1527,7 @@
                 <a:gridCol w="4204411"/>
                 <a:gridCol w="4204411"/>
               </a:tblGrid>
-              <a:tr h="475488">
+              <a:tr h="365760">
                 <a:tc>
                   <a:txBody>
                     <a:bodyPr/>
@@ -1733,7 +1733,7 @@
                   </a:tcPr>
                 </a:tc>
               </a:tr>
-              <a:tr h="475488">
+              <a:tr h="365760">
                 <a:tc>
                   <a:txBody>
                     <a:bodyPr/>
@@ -1933,7 +1933,7 @@
                   </a:tcPr>
                 </a:tc>
               </a:tr>
-              <a:tr h="475488">
+              <a:tr h="365760">
                 <a:tc>
                   <a:txBody>
                     <a:bodyPr/>
@@ -2133,7 +2133,7 @@
                   </a:tcPr>
                 </a:tc>
               </a:tr>
-              <a:tr h="475488">
+              <a:tr h="365760">
                 <a:tc>
                   <a:txBody>
                     <a:bodyPr/>
@@ -2333,7 +2333,7 @@
                   </a:tcPr>
                 </a:tc>
               </a:tr>
-              <a:tr h="475488">
+              <a:tr h="365760">
                 <a:tc>
                   <a:txBody>
                     <a:bodyPr/>
@@ -2533,7 +2533,7 @@
                   </a:tcPr>
                 </a:tc>
               </a:tr>
-              <a:tr h="475488">
+              <a:tr h="365760">
                 <a:tc>
                   <a:txBody>
                     <a:bodyPr/>
@@ -2733,7 +2733,7 @@
                   </a:tcPr>
                 </a:tc>
               </a:tr>
-              <a:tr h="475488">
+              <a:tr h="365760">
                 <a:tc>
                   <a:txBody>
                     <a:bodyPr/>
@@ -2885,6 +2885,206 @@
                           <a:cs typeface="Calibri" pitchFamily="34" charset="-120"/>
                         </a:rPr>
                         <a:t>Per-window multi-diagnosis</a:t>
+                      </a:r>
+                      <a:endParaRPr lang="en-US" sz="1300" dirty="0">
+                        <a:latin typeface="Calibri" charset="0"/>
+                        <a:ea typeface="Calibri" charset="0"/>
+                        <a:cs typeface="Calibri" charset="0"/>
+                      </a:endParaRPr>
+                    </a:p>
+                  </a:txBody>
+                  <a:tcPr marL="63500" marR="63500" marT="63500" marB="63500" anchor="ctr">
+                    <a:lnL w="6350" cap="flat" cmpd="sng" algn="ctr">
+                      <a:solidFill>
+                        <a:srgbClr val="D6DEE6"/>
+                      </a:solidFill>
+                      <a:prstDash val="solid"/>
+                      <a:round/>
+                      <a:headEnd type="none" w="med" len="med"/>
+                      <a:tailEnd type="none" w="med" len="med"/>
+                    </a:lnL>
+                    <a:lnR w="6350" cap="flat" cmpd="sng" algn="ctr">
+                      <a:solidFill>
+                        <a:srgbClr val="D6DEE6"/>
+                      </a:solidFill>
+                      <a:prstDash val="solid"/>
+                      <a:round/>
+                      <a:headEnd type="none" w="med" len="med"/>
+                      <a:tailEnd type="none" w="med" len="med"/>
+                    </a:lnR>
+                    <a:lnT w="6350" cap="flat" cmpd="sng" algn="ctr">
+                      <a:solidFill>
+                        <a:srgbClr val="D6DEE6"/>
+                      </a:solidFill>
+                      <a:prstDash val="solid"/>
+                      <a:round/>
+                      <a:headEnd type="none" w="med" len="med"/>
+                      <a:tailEnd type="none" w="med" len="med"/>
+                    </a:lnT>
+                    <a:lnB w="6350" cap="flat" cmpd="sng" algn="ctr">
+                      <a:solidFill>
+                        <a:srgbClr val="D6DEE6"/>
+                      </a:solidFill>
+                      <a:prstDash val="solid"/>
+                      <a:round/>
+                      <a:headEnd type="none" w="med" len="med"/>
+                      <a:tailEnd type="none" w="med" len="med"/>
+                    </a:lnB>
+                  </a:tcPr>
+                </a:tc>
+              </a:tr>
+              <a:tr h="365760">
+                <a:tc>
+                  <a:txBody>
+                    <a:bodyPr/>
+                    <a:lstStyle/>
+                    <a:p>
+                      <a:pPr indent="0" marL="0">
+                        <a:buNone/>
+                      </a:pPr>
+                      <a:r>
+                        <a:rPr lang="en-US" sz="1300" b="1" dirty="0">
+                          <a:solidFill>
+                            <a:srgbClr val="21295C"/>
+                          </a:solidFill>
+                          <a:latin typeface="Calibri" pitchFamily="34" charset="0"/>
+                          <a:ea typeface="Calibri" pitchFamily="34" charset="-122"/>
+                          <a:cs typeface="Calibri" pitchFamily="34" charset="-120"/>
+                        </a:rPr>
+                        <a:t>Cross-dataset labels</a:t>
+                      </a:r>
+                      <a:endParaRPr lang="en-US" sz="1300" dirty="0">
+                        <a:latin typeface="Calibri" charset="0"/>
+                        <a:ea typeface="Calibri" charset="0"/>
+                        <a:cs typeface="Calibri" charset="0"/>
+                      </a:endParaRPr>
+                    </a:p>
+                  </a:txBody>
+                  <a:tcPr marL="63500" marR="63500" marT="63500" marB="63500" anchor="ctr">
+                    <a:lnL w="6350" cap="flat" cmpd="sng" algn="ctr">
+                      <a:solidFill>
+                        <a:srgbClr val="D6DEE6"/>
+                      </a:solidFill>
+                      <a:prstDash val="solid"/>
+                      <a:round/>
+                      <a:headEnd type="none" w="med" len="med"/>
+                      <a:tailEnd type="none" w="med" len="med"/>
+                    </a:lnL>
+                    <a:lnR w="6350" cap="flat" cmpd="sng" algn="ctr">
+                      <a:solidFill>
+                        <a:srgbClr val="D6DEE6"/>
+                      </a:solidFill>
+                      <a:prstDash val="solid"/>
+                      <a:round/>
+                      <a:headEnd type="none" w="med" len="med"/>
+                      <a:tailEnd type="none" w="med" len="med"/>
+                    </a:lnR>
+                    <a:lnT w="6350" cap="flat" cmpd="sng" algn="ctr">
+                      <a:solidFill>
+                        <a:srgbClr val="D6DEE6"/>
+                      </a:solidFill>
+                      <a:prstDash val="solid"/>
+                      <a:round/>
+                      <a:headEnd type="none" w="med" len="med"/>
+                      <a:tailEnd type="none" w="med" len="med"/>
+                    </a:lnT>
+                    <a:lnB w="6350" cap="flat" cmpd="sng" algn="ctr">
+                      <a:solidFill>
+                        <a:srgbClr val="D6DEE6"/>
+                      </a:solidFill>
+                      <a:prstDash val="solid"/>
+                      <a:round/>
+                      <a:headEnd type="none" w="med" len="med"/>
+                      <a:tailEnd type="none" w="med" len="med"/>
+                    </a:lnB>
+                    <a:solidFill>
+                      <a:srgbClr val="F4F7FA"/>
+                    </a:solidFill>
+                  </a:tcPr>
+                </a:tc>
+                <a:tc>
+                  <a:txBody>
+                    <a:bodyPr/>
+                    <a:lstStyle/>
+                    <a:p>
+                      <a:pPr indent="0" marL="0">
+                        <a:buNone/>
+                      </a:pPr>
+                      <a:r>
+                        <a:rPr lang="en-US" sz="1300" b="1" dirty="0">
+                          <a:solidFill>
+                            <a:srgbClr val="1A2233"/>
+                          </a:solidFill>
+                          <a:latin typeface="Calibri" pitchFamily="34" charset="0"/>
+                          <a:ea typeface="Calibri" pitchFamily="34" charset="-122"/>
+                          <a:cs typeface="Calibri" pitchFamily="34" charset="-120"/>
+                        </a:rPr>
+                        <a:t>per-dataset; retrain or hand-map</a:t>
+                      </a:r>
+                      <a:endParaRPr lang="en-US" sz="1300" dirty="0">
+                        <a:latin typeface="Calibri" charset="0"/>
+                        <a:ea typeface="Calibri" charset="0"/>
+                        <a:cs typeface="Calibri" charset="0"/>
+                      </a:endParaRPr>
+                    </a:p>
+                  </a:txBody>
+                  <a:tcPr marL="63500" marR="63500" marT="63500" marB="63500" anchor="ctr">
+                    <a:lnL w="6350" cap="flat" cmpd="sng" algn="ctr">
+                      <a:solidFill>
+                        <a:srgbClr val="D6DEE6"/>
+                      </a:solidFill>
+                      <a:prstDash val="solid"/>
+                      <a:round/>
+                      <a:headEnd type="none" w="med" len="med"/>
+                      <a:tailEnd type="none" w="med" len="med"/>
+                    </a:lnL>
+                    <a:lnR w="6350" cap="flat" cmpd="sng" algn="ctr">
+                      <a:solidFill>
+                        <a:srgbClr val="D6DEE6"/>
+                      </a:solidFill>
+                      <a:prstDash val="solid"/>
+                      <a:round/>
+                      <a:headEnd type="none" w="med" len="med"/>
+                      <a:tailEnd type="none" w="med" len="med"/>
+                    </a:lnR>
+                    <a:lnT w="6350" cap="flat" cmpd="sng" algn="ctr">
+                      <a:solidFill>
+                        <a:srgbClr val="D6DEE6"/>
+                      </a:solidFill>
+                      <a:prstDash val="solid"/>
+                      <a:round/>
+                      <a:headEnd type="none" w="med" len="med"/>
+                      <a:tailEnd type="none" w="med" len="med"/>
+                    </a:lnT>
+                    <a:lnB w="6350" cap="flat" cmpd="sng" algn="ctr">
+                      <a:solidFill>
+                        <a:srgbClr val="D6DEE6"/>
+                      </a:solidFill>
+                      <a:prstDash val="solid"/>
+                      <a:round/>
+                      <a:headEnd type="none" w="med" len="med"/>
+                      <a:tailEnd type="none" w="med" len="med"/>
+                    </a:lnB>
+                  </a:tcPr>
+                </a:tc>
+                <a:tc>
+                  <a:txBody>
+                    <a:bodyPr/>
+                    <a:lstStyle/>
+                    <a:p>
+                      <a:pPr indent="0" marL="0">
+                        <a:buNone/>
+                      </a:pPr>
+                      <a:r>
+                        <a:rPr lang="en-US" sz="1300" b="1" dirty="0">
+                          <a:solidFill>
+                            <a:srgbClr val="1A2233"/>
+                          </a:solidFill>
+                          <a:latin typeface="Calibri" pitchFamily="34" charset="0"/>
+                          <a:ea typeface="Calibri" pitchFamily="34" charset="-122"/>
+                          <a:cs typeface="Calibri" pitchFamily="34" charset="-120"/>
+                        </a:rPr>
+                        <a:t>fixed 150-space; central map</a:t>
                       </a:r>
                       <a:endParaRPr lang="en-US" sz="1300" dirty="0">
                         <a:latin typeface="Calibri" charset="0"/>

--- a/docs/Stanford_vs_ECGFounder_2page.pptx
+++ b/docs/Stanford_vs_ECGFounder_2page.pptx
@@ -1050,8 +1050,8 @@
         </p:nvSpPr>
         <p:spPr>
           <a:xfrm>
-            <a:off x="548640" y="1417320"/>
-            <a:ext cx="5257800" cy="1783080"/>
+            <a:off x="548640" y="1371600"/>
+            <a:ext cx="5257800" cy="2194560"/>
           </a:xfrm>
           <a:prstGeom prst="rect">
             <a:avLst/>
@@ -1075,8 +1075,8 @@
         </p:nvSpPr>
         <p:spPr>
           <a:xfrm>
-            <a:off x="548640" y="1417320"/>
-            <a:ext cx="118872" cy="1783080"/>
+            <a:off x="548640" y="1371600"/>
+            <a:ext cx="118872" cy="2194560"/>
           </a:xfrm>
           <a:prstGeom prst="rect">
             <a:avLst/>
@@ -1095,7 +1095,7 @@
         </p:nvSpPr>
         <p:spPr>
           <a:xfrm>
-            <a:off x="868680" y="1600200"/>
+            <a:off x="868680" y="1554480"/>
             <a:ext cx="4754880" cy="457200"/>
           </a:xfrm>
           <a:prstGeom prst="rect">
@@ -1134,7 +1134,7 @@
         </p:nvSpPr>
         <p:spPr>
           <a:xfrm>
-            <a:off x="868680" y="2075688"/>
+            <a:off x="868680" y="2029968"/>
             <a:ext cx="4754880" cy="365760"/>
           </a:xfrm>
           <a:prstGeom prst="rect">
@@ -1173,8 +1173,8 @@
         </p:nvSpPr>
         <p:spPr>
           <a:xfrm>
-            <a:off x="868680" y="2606040"/>
-            <a:ext cx="4709160" cy="411480"/>
+            <a:off x="868680" y="2560320"/>
+            <a:ext cx="4709160" cy="822960"/>
           </a:xfrm>
           <a:prstGeom prst="rect">
             <a:avLst/>
@@ -1188,13 +1188,13 @@
           <a:p>
             <a:pPr marL="342900" indent="-342900">
               <a:lnSpc>
-                <a:spcPct val="125000"/>
+                <a:spcPct val="120000"/>
               </a:lnSpc>
               <a:buSzPct val="100000"/>
               <a:buChar char="•"/>
             </a:pPr>
             <a:r>
-              <a:rPr lang="en-US" sz="1400" dirty="0">
+              <a:rPr lang="en-US" sz="1200" dirty="0">
                 <a:solidFill>
                   <a:srgbClr val="1A2233"/>
                 </a:solidFill>
@@ -1202,20 +1202,20 @@
                 <a:ea typeface="Calibri" pitchFamily="34" charset="-122"/>
                 <a:cs typeface="Calibri" pitchFamily="34" charset="-120"/>
               </a:rPr>
-              <a:t>Task-specific net, trained from scratch</a:t>
+              <a:t>91K records / 53.5K patients (Zio, 200 Hz)</a:t>
             </a:r>
-            <a:endParaRPr lang="en-US" sz="1400" dirty="0"/>
+            <a:endParaRPr lang="en-US" sz="1200" dirty="0"/>
           </a:p>
           <a:p>
             <a:pPr marL="342900" indent="-342900">
               <a:lnSpc>
-                <a:spcPct val="125000"/>
+                <a:spcPct val="120000"/>
               </a:lnSpc>
               <a:buSzPct val="100000"/>
               <a:buChar char="•"/>
             </a:pPr>
             <a:r>
-              <a:rPr lang="en-US" sz="1400" dirty="0">
+              <a:rPr lang="en-US" sz="1200" dirty="0">
                 <a:solidFill>
                   <a:srgbClr val="1A2233"/>
                 </a:solidFill>
@@ -1223,20 +1223,20 @@
                 <a:ea typeface="Calibri" pitchFamily="34" charset="-122"/>
                 <a:cs typeface="Calibri" pitchFamily="34" charset="-120"/>
               </a:rPr>
-              <a:t>Keras / TensorFlow</a:t>
+              <a:t>34-layer 1D ResNet, trained from scratch</a:t>
             </a:r>
-            <a:endParaRPr lang="en-US" sz="1400" dirty="0"/>
+            <a:endParaRPr lang="en-US" sz="1200" dirty="0"/>
           </a:p>
           <a:p>
             <a:pPr marL="342900" indent="-342900">
               <a:lnSpc>
-                <a:spcPct val="125000"/>
+                <a:spcPct val="120000"/>
               </a:lnSpc>
               <a:buSzPct val="100000"/>
               <a:buChar char="•"/>
             </a:pPr>
             <a:r>
-              <a:rPr lang="en-US" sz="1400" dirty="0">
+              <a:rPr lang="en-US" sz="1200" dirty="0">
                 <a:solidFill>
                   <a:srgbClr val="1A2233"/>
                 </a:solidFill>
@@ -1244,20 +1244,20 @@
                 <a:ea typeface="Calibri" pitchFamily="34" charset="-122"/>
                 <a:cs typeface="Calibri" pitchFamily="34" charset="-120"/>
               </a:rPr>
-              <a:t>Continuous ambulatory rhythm strips</a:t>
+              <a:t>12 classes; 1 label / 1.28 s (seq-to-seq)</a:t>
             </a:r>
-            <a:endParaRPr lang="en-US" sz="1400" dirty="0"/>
+            <a:endParaRPr lang="en-US" sz="1200" dirty="0"/>
           </a:p>
           <a:p>
             <a:pPr marL="342900" indent="-342900">
               <a:lnSpc>
-                <a:spcPct val="125000"/>
+                <a:spcPct val="120000"/>
               </a:lnSpc>
               <a:buSzPct val="100000"/>
               <a:buChar char="•"/>
             </a:pPr>
             <a:r>
-              <a:rPr lang="en-US" sz="1400" dirty="0">
+              <a:rPr lang="en-US" sz="1200" dirty="0">
                 <a:solidFill>
                   <a:srgbClr val="1A2233"/>
                 </a:solidFill>
@@ -1265,9 +1265,9 @@
                 <a:ea typeface="Calibri" pitchFamily="34" charset="-122"/>
                 <a:cs typeface="Calibri" pitchFamily="34" charset="-120"/>
               </a:rPr>
-              <a:t>Few classes, one rhythm per segment</a:t>
+              <a:t>AUC 0.97 &gt; cardiologist (F1 .837 vs .780)</a:t>
             </a:r>
-            <a:endParaRPr lang="en-US" sz="1400" dirty="0"/>
+            <a:endParaRPr lang="en-US" sz="1200" dirty="0"/>
           </a:p>
         </p:txBody>
       </p:sp>
@@ -1279,8 +1279,8 @@
         </p:nvSpPr>
         <p:spPr>
           <a:xfrm>
-            <a:off x="6355080" y="1417320"/>
-            <a:ext cx="5257800" cy="1783080"/>
+            <a:off x="6355080" y="1371600"/>
+            <a:ext cx="5257800" cy="2194560"/>
           </a:xfrm>
           <a:prstGeom prst="rect">
             <a:avLst/>
@@ -1304,8 +1304,8 @@
         </p:nvSpPr>
         <p:spPr>
           <a:xfrm>
-            <a:off x="6355080" y="1417320"/>
-            <a:ext cx="118872" cy="1783080"/>
+            <a:off x="6355080" y="1371600"/>
+            <a:ext cx="118872" cy="2194560"/>
           </a:xfrm>
           <a:prstGeom prst="rect">
             <a:avLst/>
@@ -1324,7 +1324,7 @@
         </p:nvSpPr>
         <p:spPr>
           <a:xfrm>
-            <a:off x="6675120" y="1600200"/>
+            <a:off x="6675120" y="1554480"/>
             <a:ext cx="4754880" cy="457200"/>
           </a:xfrm>
           <a:prstGeom prst="rect">
@@ -1363,7 +1363,7 @@
         </p:nvSpPr>
         <p:spPr>
           <a:xfrm>
-            <a:off x="6675120" y="2075688"/>
+            <a:off x="6675120" y="2029968"/>
             <a:ext cx="4754880" cy="365760"/>
           </a:xfrm>
           <a:prstGeom prst="rect">
@@ -1388,7 +1388,7 @@
                 <a:ea typeface="Calibri" pitchFamily="34" charset="-122"/>
                 <a:cs typeface="Calibri" pitchFamily="34" charset="-120"/>
               </a:rPr>
-              <a:t>Foundation model, pretrained on millions of ECGs</a:t>
+              <a:t>Li et al. 2025 (arXiv 2410.04133) - our base model</a:t>
             </a:r>
             <a:endParaRPr lang="en-US" sz="1200" dirty="0"/>
           </a:p>
@@ -1402,8 +1402,8 @@
         </p:nvSpPr>
         <p:spPr>
           <a:xfrm>
-            <a:off x="6675120" y="2606040"/>
-            <a:ext cx="4709160" cy="411480"/>
+            <a:off x="6675120" y="2560320"/>
+            <a:ext cx="4709160" cy="822960"/>
           </a:xfrm>
           <a:prstGeom prst="rect">
             <a:avLst/>
@@ -1417,13 +1417,13 @@
           <a:p>
             <a:pPr marL="342900" indent="-342900">
               <a:lnSpc>
-                <a:spcPct val="125000"/>
+                <a:spcPct val="120000"/>
               </a:lnSpc>
               <a:buSzPct val="100000"/>
               <a:buChar char="•"/>
             </a:pPr>
             <a:r>
-              <a:rPr lang="en-US" sz="1400" dirty="0">
+              <a:rPr lang="en-US" sz="1200" dirty="0">
                 <a:solidFill>
                   <a:srgbClr val="1A2233"/>
                 </a:solidFill>
@@ -1431,20 +1431,20 @@
                 <a:ea typeface="Calibri" pitchFamily="34" charset="-122"/>
                 <a:cs typeface="Calibri" pitchFamily="34" charset="-120"/>
               </a:rPr>
-              <a:t>Pretrained backbone, then fine-tuned</a:t>
+              <a:t>10.8M ECGs / 1.8M subjects; 150 labels</a:t>
             </a:r>
-            <a:endParaRPr lang="en-US" sz="1400" dirty="0"/>
+            <a:endParaRPr lang="en-US" sz="1200" dirty="0"/>
           </a:p>
           <a:p>
             <a:pPr marL="342900" indent="-342900">
               <a:lnSpc>
-                <a:spcPct val="125000"/>
+                <a:spcPct val="120000"/>
               </a:lnSpc>
               <a:buSzPct val="100000"/>
               <a:buChar char="•"/>
             </a:pPr>
             <a:r>
-              <a:rPr lang="en-US" sz="1400" dirty="0">
+              <a:rPr lang="en-US" sz="1200" dirty="0">
                 <a:solidFill>
                   <a:srgbClr val="1A2233"/>
                 </a:solidFill>
@@ -1452,20 +1452,20 @@
                 <a:ea typeface="Calibri" pitchFamily="34" charset="-122"/>
                 <a:cs typeface="Calibri" pitchFamily="34" charset="-120"/>
               </a:rPr>
-              <a:t>PyTorch (Net1D, ~30.8M params)</a:t>
+              <a:t>Net1D/RegNet foundation; PU-learning loss</a:t>
             </a:r>
-            <a:endParaRPr lang="en-US" sz="1400" dirty="0"/>
+            <a:endParaRPr lang="en-US" sz="1200" dirty="0"/>
           </a:p>
           <a:p>
             <a:pPr marL="342900" indent="-342900">
               <a:lnSpc>
-                <a:spcPct val="125000"/>
+                <a:spcPct val="120000"/>
               </a:lnSpc>
               <a:buSzPct val="100000"/>
               <a:buChar char="•"/>
             </a:pPr>
             <a:r>
-              <a:rPr lang="en-US" sz="1400" dirty="0">
+              <a:rPr lang="en-US" sz="1200" dirty="0">
                 <a:solidFill>
                   <a:srgbClr val="1A2233"/>
                 </a:solidFill>
@@ -1473,20 +1473,20 @@
                 <a:ea typeface="Calibri" pitchFamily="34" charset="-122"/>
                 <a:cs typeface="Calibri" pitchFamily="34" charset="-120"/>
               </a:rPr>
-              <a:t>Per-window multi-label diagnosis</a:t>
+              <a:t>Single-lead = lead augmentation (our fuzzy)</a:t>
             </a:r>
-            <a:endParaRPr lang="en-US" sz="1400" dirty="0"/>
+            <a:endParaRPr lang="en-US" sz="1200" dirty="0"/>
           </a:p>
           <a:p>
             <a:pPr marL="342900" indent="-342900">
               <a:lnSpc>
-                <a:spcPct val="125000"/>
+                <a:spcPct val="120000"/>
               </a:lnSpc>
               <a:buSzPct val="100000"/>
               <a:buChar char="•"/>
             </a:pPr>
             <a:r>
-              <a:rPr lang="en-US" sz="1400" dirty="0">
+              <a:rPr lang="en-US" sz="1200" dirty="0">
                 <a:solidFill>
                   <a:srgbClr val="1A2233"/>
                 </a:solidFill>
@@ -1494,9 +1494,9 @@
                 <a:ea typeface="Calibri" pitchFamily="34" charset="-122"/>
                 <a:cs typeface="Calibri" pitchFamily="34" charset="-120"/>
               </a:rPr>
-              <a:t>150 classes, co-occurring diagnoses</a:t>
+              <a:t>Committee AUROC .968; CODE-test .981</a:t>
             </a:r>
-            <a:endParaRPr lang="en-US" sz="1400" dirty="0"/>
+            <a:endParaRPr lang="en-US" sz="1200" dirty="0"/>
           </a:p>
         </p:txBody>
       </p:sp>
@@ -1515,7 +1515,7 @@
           </p:nvPr>
         </p:nvGraphicFramePr>
         <p:xfrm>
-          <a:off x="548640" y="3383280"/>
+          <a:off x="548640" y="3703320"/>
           <a:ext cx="11064240" cy="914400"/>
         </p:xfrm>
         <a:graphic>
@@ -1527,7 +1527,7 @@
                 <a:gridCol w="4204411"/>
                 <a:gridCol w="4204411"/>
               </a:tblGrid>
-              <a:tr h="365760">
+              <a:tr h="329184">
                 <a:tc>
                   <a:txBody>
                     <a:bodyPr/>
@@ -1733,7 +1733,7 @@
                   </a:tcPr>
                 </a:tc>
               </a:tr>
-              <a:tr h="365760">
+              <a:tr h="329184">
                 <a:tc>
                   <a:txBody>
                     <a:bodyPr/>
@@ -1819,7 +1819,7 @@
                           <a:ea typeface="Calibri" pitchFamily="34" charset="-122"/>
                           <a:cs typeface="Calibri" pitchFamily="34" charset="-120"/>
                         </a:rPr>
-                        <a:t>Sequence: 1 label / ~1.3 s</a:t>
+                        <a:t>Sequence: 1 label / 1.28 s</a:t>
                       </a:r>
                       <a:endParaRPr lang="en-US" sz="1300" dirty="0">
                         <a:latin typeface="Calibri" charset="0"/>
@@ -1933,7 +1933,7 @@
                   </a:tcPr>
                 </a:tc>
               </a:tr>
-              <a:tr h="365760">
+              <a:tr h="329184">
                 <a:tc>
                   <a:txBody>
                     <a:bodyPr/>
@@ -2133,7 +2133,7 @@
                   </a:tcPr>
                 </a:tc>
               </a:tr>
-              <a:tr h="365760">
+              <a:tr h="329184">
                 <a:tc>
                   <a:txBody>
                     <a:bodyPr/>
@@ -2333,7 +2333,7 @@
                   </a:tcPr>
                 </a:tc>
               </a:tr>
-              <a:tr h="365760">
+              <a:tr h="329184">
                 <a:tc>
                   <a:txBody>
                     <a:bodyPr/>
@@ -2533,7 +2533,7 @@
                   </a:tcPr>
                 </a:tc>
               </a:tr>
-              <a:tr h="365760">
+              <a:tr h="329184">
                 <a:tc>
                   <a:txBody>
                     <a:bodyPr/>
@@ -2733,7 +2733,7 @@
                   </a:tcPr>
                 </a:tc>
               </a:tr>
-              <a:tr h="365760">
+              <a:tr h="329184">
                 <a:tc>
                   <a:txBody>
                     <a:bodyPr/>
@@ -2933,7 +2933,7 @@
                   </a:tcPr>
                 </a:tc>
               </a:tr>
-              <a:tr h="365760">
+              <a:tr h="329184">
                 <a:tc>
                   <a:txBody>
                     <a:bodyPr/>
